--- a/raw/utama-id/00-Slide-Kuliah/01-pengantar-komputer-os.pptx
+++ b/raw/utama-id/00-Slide-Kuliah/01-pengantar-komputer-os.pptx
@@ -7724,7 +7724,7 @@
             </a:pPr>
             <a:r>
               <a:rPr sz="1450"/>
-              <a:t>Ubah 10110 biner ke desimal dan tuliskan bobot tiap digit.</a:t>
+              <a:t>Jika pengguna mengisi B1 dan B2 lalu menjalankan DemoExcel, urutkan alur input, Excel, VBA, CPU/memori, worksheet, dan output.</a:t>
             </a:r>
           </a:p>
           <a:p>
@@ -7775,7 +7775,7 @@
           <a:lstStyle/>
           <a:p>
             <a:r>
-              <a:t>Kuis Singkat</a:t>
+              <a:t>Latihan Singkat</a:t>
             </a:r>
           </a:p>
         </p:txBody>
@@ -8811,7 +8811,7 @@
                             <a:srgbClr val="404040"/>
                           </a:solidFill>
                         </a:rPr>
-                        <a:t>Kuis, pembahasan, exit ticket</a:t>
+                        <a:t>Latihan, pembahasan, exit ticket</a:t>
                       </a:r>
                     </a:p>
                   </a:txBody>
